--- a/3 am/الصيغ 2/cours 5/مفهوم الصيغ ـــ عرض.pptx
+++ b/3 am/الصيغ 2/cours 5/مفهوم الصيغ ـــ عرض.pptx
@@ -249,7 +249,7 @@
           <a:p>
             <a:fld id="{33E46DBA-FA3B-4C5F-B700-4671668DAB72}" type="datetimeFigureOut">
               <a:rPr lang="fr-FR" smtClean="0"/>
-              <a:t>07/01/2025</a:t>
+              <a:t>08/01/2025</a:t>
             </a:fld>
             <a:endParaRPr lang="fr-FR"/>
           </a:p>
@@ -419,7 +419,7 @@
           <a:p>
             <a:fld id="{33E46DBA-FA3B-4C5F-B700-4671668DAB72}" type="datetimeFigureOut">
               <a:rPr lang="fr-FR" smtClean="0"/>
-              <a:t>07/01/2025</a:t>
+              <a:t>08/01/2025</a:t>
             </a:fld>
             <a:endParaRPr lang="fr-FR"/>
           </a:p>
@@ -599,7 +599,7 @@
           <a:p>
             <a:fld id="{33E46DBA-FA3B-4C5F-B700-4671668DAB72}" type="datetimeFigureOut">
               <a:rPr lang="fr-FR" smtClean="0"/>
-              <a:t>07/01/2025</a:t>
+              <a:t>08/01/2025</a:t>
             </a:fld>
             <a:endParaRPr lang="fr-FR"/>
           </a:p>
@@ -769,7 +769,7 @@
           <a:p>
             <a:fld id="{33E46DBA-FA3B-4C5F-B700-4671668DAB72}" type="datetimeFigureOut">
               <a:rPr lang="fr-FR" smtClean="0"/>
-              <a:t>07/01/2025</a:t>
+              <a:t>08/01/2025</a:t>
             </a:fld>
             <a:endParaRPr lang="fr-FR"/>
           </a:p>
@@ -1015,7 +1015,7 @@
           <a:p>
             <a:fld id="{33E46DBA-FA3B-4C5F-B700-4671668DAB72}" type="datetimeFigureOut">
               <a:rPr lang="fr-FR" smtClean="0"/>
-              <a:t>07/01/2025</a:t>
+              <a:t>08/01/2025</a:t>
             </a:fld>
             <a:endParaRPr lang="fr-FR"/>
           </a:p>
@@ -1247,7 +1247,7 @@
           <a:p>
             <a:fld id="{33E46DBA-FA3B-4C5F-B700-4671668DAB72}" type="datetimeFigureOut">
               <a:rPr lang="fr-FR" smtClean="0"/>
-              <a:t>07/01/2025</a:t>
+              <a:t>08/01/2025</a:t>
             </a:fld>
             <a:endParaRPr lang="fr-FR"/>
           </a:p>
@@ -1614,7 +1614,7 @@
           <a:p>
             <a:fld id="{33E46DBA-FA3B-4C5F-B700-4671668DAB72}" type="datetimeFigureOut">
               <a:rPr lang="fr-FR" smtClean="0"/>
-              <a:t>07/01/2025</a:t>
+              <a:t>08/01/2025</a:t>
             </a:fld>
             <a:endParaRPr lang="fr-FR"/>
           </a:p>
@@ -1732,7 +1732,7 @@
           <a:p>
             <a:fld id="{33E46DBA-FA3B-4C5F-B700-4671668DAB72}" type="datetimeFigureOut">
               <a:rPr lang="fr-FR" smtClean="0"/>
-              <a:t>07/01/2025</a:t>
+              <a:t>08/01/2025</a:t>
             </a:fld>
             <a:endParaRPr lang="fr-FR"/>
           </a:p>
@@ -1827,7 +1827,7 @@
           <a:p>
             <a:fld id="{33E46DBA-FA3B-4C5F-B700-4671668DAB72}" type="datetimeFigureOut">
               <a:rPr lang="fr-FR" smtClean="0"/>
-              <a:t>07/01/2025</a:t>
+              <a:t>08/01/2025</a:t>
             </a:fld>
             <a:endParaRPr lang="fr-FR"/>
           </a:p>
@@ -2104,7 +2104,7 @@
           <a:p>
             <a:fld id="{33E46DBA-FA3B-4C5F-B700-4671668DAB72}" type="datetimeFigureOut">
               <a:rPr lang="fr-FR" smtClean="0"/>
-              <a:t>07/01/2025</a:t>
+              <a:t>08/01/2025</a:t>
             </a:fld>
             <a:endParaRPr lang="fr-FR"/>
           </a:p>
@@ -2357,7 +2357,7 @@
           <a:p>
             <a:fld id="{33E46DBA-FA3B-4C5F-B700-4671668DAB72}" type="datetimeFigureOut">
               <a:rPr lang="fr-FR" smtClean="0"/>
-              <a:t>07/01/2025</a:t>
+              <a:t>08/01/2025</a:t>
             </a:fld>
             <a:endParaRPr lang="fr-FR"/>
           </a:p>
@@ -2570,7 +2570,7 @@
           <a:p>
             <a:fld id="{33E46DBA-FA3B-4C5F-B700-4671668DAB72}" type="datetimeFigureOut">
               <a:rPr lang="fr-FR" smtClean="0"/>
-              <a:t>07/01/2025</a:t>
+              <a:t>08/01/2025</a:t>
             </a:fld>
             <a:endParaRPr lang="fr-FR"/>
           </a:p>
@@ -3021,7 +3021,7 @@
         </p:blipFill>
         <p:spPr bwMode="auto">
           <a:xfrm>
-            <a:off x="247970" y="1592481"/>
+            <a:off x="448206" y="1627406"/>
             <a:ext cx="11475075" cy="4743312"/>
           </a:xfrm>
           <a:prstGeom prst="rect">
@@ -3237,8 +3237,8 @@
         </p:nvSpPr>
         <p:spPr>
           <a:xfrm>
-            <a:off x="3142445" y="374533"/>
-            <a:ext cx="8706117" cy="5299912"/>
+            <a:off x="4408714" y="374533"/>
+            <a:ext cx="7439848" cy="5299912"/>
           </a:xfrm>
           <a:prstGeom prst="rect">
             <a:avLst/>
@@ -5780,22 +5780,7 @@
                 <a:ea typeface="Calibri" panose="020F0502020204030204" pitchFamily="34" charset="0"/>
                 <a:cs typeface="Times New Roman" panose="02020603050405020304" pitchFamily="18" charset="0"/>
               </a:rPr>
-              <a:t>م </a:t>
-            </a:r>
-            <a:r>
-              <a:rPr kumimoji="0" lang="ar-DZ" sz="2800" b="1" i="0" u="none" strike="noStrike" cap="none" normalizeH="0" baseline="0" dirty="0" smtClean="0">
-                <a:ln>
-                  <a:noFill/>
-                </a:ln>
-                <a:solidFill>
-                  <a:schemeClr val="tx1"/>
-                </a:solidFill>
-                <a:effectLst/>
-                <a:latin typeface="Times New Roman" panose="02020603050405020304" pitchFamily="18" charset="0"/>
-                <a:ea typeface="Calibri" panose="020F0502020204030204" pitchFamily="34" charset="0"/>
-                <a:cs typeface="Times New Roman" panose="02020603050405020304" pitchFamily="18" charset="0"/>
-              </a:rPr>
-              <a:t>الآن بكتابة العدد 100 في الخلية </a:t>
+              <a:t>م الآن بكتابة العدد 100 في الخلية </a:t>
             </a:r>
             <a:r>
               <a:rPr kumimoji="0" lang="fr-FR" sz="2800" b="1" i="0" u="none" strike="noStrike" cap="none" normalizeH="0" baseline="0" dirty="0" smtClean="0">
